--- a/발표자료/예정된 전쟁.pptx
+++ b/발표자료/예정된 전쟁.pptx
@@ -126,21 +126,21 @@
   <p:extLst>
     <p:ext uri="{521415D9-36F7-43E2-AB2F-B90AF26B5E84}">
       <p14:sectionLst xmlns:p14="http://schemas.microsoft.com/office/powerpoint/2010/main">
-        <p14:section name="도입" id="{1010bd65-d1ed-5ba4-c44d-36061c1e9d59}">
+        <p14:section name="도입" id="{a7a7a737-45e9-28f6-9e69-d12255d761fe}">
           <p14:sldIdLst>
             <p14:sldId id="256"/>
             <p14:sldId id="257"/>
             <p14:sldId id="258"/>
           </p14:sldIdLst>
         </p14:section>
-        <p14:section name="투키디데스 함정의 원리" id="{355ef0bc-780e-2125-e5b2-bac6ae98b51b}">
+        <p14:section name="투키디데스 함정의 원리" id="{380b864c-17bf-774a-13b2-0d2482999133}">
           <p14:sldIdLst>
             <p14:sldId id="259"/>
             <p14:sldId id="260"/>
             <p14:sldId id="261"/>
           </p14:sldIdLst>
         </p14:section>
-        <p14:section name="중국의 부상과 500년의 역사" id="{0710e626-5435-9e64-ce95-db69e297f839}">
+        <p14:section name="중국의 부상과 500년의 역사" id="{9e8945a0-9100-d853-cb20-1d02a2b8f9b8}">
           <p14:sldIdLst>
             <p14:sldId id="262"/>
             <p14:sldId id="263"/>
@@ -148,7 +148,7 @@
             <p14:sldId id="265"/>
           </p14:sldIdLst>
         </p14:section>
-        <p14:section name="미중 충돌의 구조와 시나리오" id="{d288cb6d-89a9-069c-321e-35eaab2d7c46}">
+        <p14:section name="미중 충돌의 구조와 시나리오" id="{985585bf-e3a4-45f8-3d8e-89823baf1899}">
           <p14:sldIdLst>
             <p14:sldId id="266"/>
             <p14:sldId id="267"/>
@@ -156,13 +156,13 @@
             <p14:sldId id="269"/>
           </p14:sldIdLst>
         </p14:section>
-        <p14:section name="전쟁을 피하는 길" id="{2488b99e-c227-b2ee-91d9-5dc6c3728862}">
+        <p14:section name="전쟁을 피하는 길" id="{cd6c9cd4-0a22-b21b-9f37-d267785d2688}">
           <p14:sldIdLst>
             <p14:sldId id="270"/>
             <p14:sldId id="271"/>
           </p14:sldIdLst>
         </p14:section>
-        <p14:section name="출간 이후와 우리의 과제" id="{411eacc5-badf-bc96-f7e7-55702ee50071}">
+        <p14:section name="출간 이후와 우리의 과제" id="{e6eb3b5c-0814-9b36-00f5-d591eddd4053}">
           <p14:sldIdLst>
             <p14:sldId id="272"/>
             <p14:sldId id="273"/>
@@ -2324,7 +2324,7 @@
     <p:bg>
       <p:bgPr>
         <a:solidFill>
-          <a:srgbClr val="F4F1EA"/>
+          <a:srgbClr val="FFFFFF"/>
         </a:solidFill>
       </p:bgPr>
     </p:bg>
@@ -2485,7 +2485,7 @@
     <p:bg>
       <p:bgPr>
         <a:solidFill>
-          <a:srgbClr val="F4F1EA"/>
+          <a:srgbClr val="FFFFFF"/>
         </a:solidFill>
       </p:bgPr>
     </p:bg>
@@ -2603,172 +2603,11 @@
 
 <file path=ppt/slideLayouts/slideLayout4.xml><?xml version="1.0" encoding="utf-8"?>
 <p:sldLayout xmlns:a="http://schemas.openxmlformats.org/drawingml/2006/main" xmlns:r="http://schemas.openxmlformats.org/officeDocument/2006/relationships" xmlns:p="http://schemas.openxmlformats.org/presentationml/2006/main" preserve="1">
-  <p:cSld name="ACCENT">
+  <p:cSld name="PLAIN">
     <p:bg>
       <p:bgPr>
         <a:solidFill>
-          <a:srgbClr val="A63D24"/>
-        </a:solidFill>
-      </p:bgPr>
-    </p:bg>
-    <p:spTree>
-      <p:nvGrpSpPr>
-        <p:cNvPr id="1" name=""/>
-        <p:cNvGrpSpPr/>
-        <p:nvPr/>
-      </p:nvGrpSpPr>
-      <p:grpSpPr>
-        <a:xfrm>
-          <a:off x="0" y="0"/>
-          <a:ext cx="0" cy="0"/>
-          <a:chOff x="0" y="0"/>
-          <a:chExt cx="0" cy="0"/>
-        </a:xfrm>
-      </p:grpSpPr>
-      <p:sp>
-        <p:nvSpPr>
-          <p:cNvPr id="2" name="Text 0"/>
-          <p:cNvSpPr/>
-          <p:nvPr/>
-        </p:nvSpPr>
-        <p:spPr>
-          <a:xfrm>
-            <a:off x="812800" y="6235700"/>
-            <a:ext cx="7620000" cy="215900"/>
-          </a:xfrm>
-          <a:prstGeom prst="rect">
-            <a:avLst/>
-          </a:prstGeom>
-          <a:noFill/>
-          <a:ln/>
-        </p:spPr>
-        <p:txBody>
-          <a:bodyPr wrap="square" lIns="0" tIns="0" rIns="0" bIns="0" rtlCol="0" anchor="ctr"/>
-          <a:lstStyle/>
-          <a:p>
-            <a:pPr eaLnBrk="0" indent="0" marL="0">
-              <a:buNone/>
-            </a:pPr>
-            <a:r>
-              <a:rPr lang="ko-KR" altLang="en-US" sz="1200" dirty="0">
-                <a:solidFill>
-                  <a:srgbClr val="F6DCCF"/>
-                </a:solidFill>
-                <a:latin typeface="맑은 고딕" pitchFamily="34" charset="0"/>
-                <a:ea typeface="맑은 고딕" pitchFamily="34" charset="-122"/>
-                <a:cs typeface="맑은 고딕" pitchFamily="34" charset="-120"/>
-              </a:rPr>
-              <a:t>예정된 전쟁 · 그레이엄 앨리슨</a:t>
-            </a:r>
-            <a:endParaRPr lang="ko-KR" altLang="en-US" sz="1200" dirty="0"/>
-          </a:p>
-        </p:txBody>
-      </p:sp>
-      <p:sp>
-        <p:nvSpPr>
-          <p:cNvPr id="3" name="Text 1"/>
-          <p:cNvSpPr/>
-          <p:nvPr>
-            <p:ph idx="101" type="title" hasCustomPrompt="1"/>
-          </p:nvPr>
-        </p:nvSpPr>
-        <p:spPr>
-          <a:xfrm>
-            <a:off x="812800" y="1066800"/>
-            <a:ext cx="10566400" cy="609600"/>
-          </a:xfrm>
-          <a:prstGeom prst="rect">
-            <a:avLst/>
-          </a:prstGeom>
-          <a:noFill/>
-          <a:ln/>
-        </p:spPr>
-        <p:txBody>
-          <a:bodyPr wrap="square" rtlCol="0"/>
-          <a:lstStyle>
-            <a:lvl1pPr algn="l" indent="0" marL="0">
-              <a:buNone/>
-              <a:defRPr lang="ko-KR" altLang="en-US" sz="3200" b="1" dirty="0">
-                <a:solidFill>
-                  <a:srgbClr val="FBF9F4"/>
-                </a:solidFill>
-                <a:latin typeface="바탕" pitchFamily="34" charset="0"/>
-                <a:ea typeface="바탕" pitchFamily="34" charset="-122"/>
-                <a:cs typeface="바탕" pitchFamily="34" charset="-120"/>
-              </a:defRPr>
-            </a:lvl1pPr>
-          </a:lstStyle>
-          <a:p>
-            <a:pPr eaLnBrk="0" algn="l" indent="0" marL="0">
-              <a:buNone/>
-            </a:pPr>
-            <a:endParaRPr lang="ko-KR" altLang="en-US" sz="3200" dirty="0"/>
-          </a:p>
-        </p:txBody>
-      </p:sp>
-      <p:sp>
-        <p:nvSpPr>
-          <p:cNvPr id="25" name="Slide Number Placeholder 0"/>
-          <p:cNvSpPr>
-            <a:spLocks noGrp="1"/>
-          </p:cNvSpPr>
-          <p:nvPr>
-            <p:ph type="sldNum" sz="quarter" idx="4294967295"/>
-          </p:nvPr>
-        </p:nvSpPr>
-        <p:spPr>
-          <a:xfrm>
-            <a:off x="10109200" y="6235700"/>
-            <a:ext cx="1270000" cy="215900"/>
-          </a:xfrm>
-          <a:prstGeom prst="rect">
-            <a:avLst/>
-          </a:prstGeom>
-          <a:extLst>
-            <a:ext uri="{C572A759-6A51-4108-AA02-DFA0A04FC94B}">
-              <ma14:wrappingTextBoxFlag xmlns:ma14="http://schemas.microsoft.com/office/mac/drawingml/2011/main" val="0"/>
-            </a:ext>
-          </a:extLst>
-        </p:spPr>
-        <p:txBody>
-          <a:bodyPr lIns="0" tIns="0" rIns="0" bIns="0"/>
-          <a:lstStyle>
-            <a:lvl1pPr>
-              <a:defRPr sz="1200">
-                <a:solidFill>
-                  <a:srgbClr val="F6DCCF"/>
-                </a:solidFill>
-                <a:latin typeface="맑은 고딕"/>
-                <a:ea typeface="맑은 고딕"/>
-                <a:cs typeface="맑은 고딕"/>
-              </a:defRPr>
-            </a:lvl1pPr>
-          </a:lstStyle>
-          <a:p>
-            <a:pPr eaLnBrk="0" algn="r"/>
-            <a:fld id="{F7021451-1387-4CA6-816F-3879F97B5CBC}" type="slidenum">
-              <a:rPr b="0" lang="ko-KR" altLang="en-US"/>
-              <a:t>1004</a:t>
-            </a:fld>
-            <a:endParaRPr lang="ko-KR" altLang="en-US"/>
-          </a:p>
-        </p:txBody>
-      </p:sp>
-    </p:spTree>
-  </p:cSld>
-  <p:clrMapOvr>
-    <a:masterClrMapping/>
-  </p:clrMapOvr>
-</p:sldLayout>
-</file>
-
-<file path=ppt/slideLayouts/slideLayout5.xml><?xml version="1.0" encoding="utf-8"?>
-<p:sldLayout xmlns:a="http://schemas.openxmlformats.org/drawingml/2006/main" xmlns:r="http://schemas.openxmlformats.org/officeDocument/2006/relationships" xmlns:p="http://schemas.openxmlformats.org/presentationml/2006/main" preserve="1">
-  <p:cSld name="DARK">
-    <p:bg>
-      <p:bgPr>
-        <a:solidFill>
-          <a:srgbClr val="1B1F2A"/>
+          <a:srgbClr val="FFFFFF"/>
         </a:solidFill>
       </p:bgPr>
     </p:bg>
@@ -2867,7 +2706,6 @@
     <p:sldLayoutId id="2147483650" r:id="rId2"/>
     <p:sldLayoutId id="2147483651" r:id="rId3"/>
     <p:sldLayoutId id="2147483652" r:id="rId4"/>
-    <p:sldLayoutId id="2147483653" r:id="rId5"/>
   </p:sldLayoutIdLst>
   <p:hf sldNum="0" hdr="0" ftr="0" dt="0"/>
   <p:txStyles>
@@ -3170,7 +3008,7 @@
             <a:r>
               <a:rPr lang="ko-KR" altLang="en-US" sz="1400" b="1" dirty="0">
                 <a:solidFill>
-                  <a:srgbClr val="E08A6B"/>
+                  <a:srgbClr val="A63D24"/>
                 </a:solidFill>
                 <a:latin typeface="맑은 고딕" pitchFamily="34" charset="0"/>
                 <a:ea typeface="맑은 고딕" pitchFamily="34" charset="-122"/>
@@ -3212,7 +3050,7 @@
             <a:r>
               <a:rPr lang="ko-KR" altLang="en-US" sz="8000" b="1" dirty="0">
                 <a:solidFill>
-                  <a:srgbClr val="F4F1EA"/>
+                  <a:srgbClr val="1B1F2A"/>
                 </a:solidFill>
                 <a:latin typeface="바탕" pitchFamily="34" charset="0"/>
                 <a:ea typeface="바탕" pitchFamily="34" charset="-122"/>
@@ -3254,7 +3092,7 @@
             <a:r>
               <a:rPr lang="ko-KR" altLang="en-US" sz="2200" dirty="0">
                 <a:solidFill>
-                  <a:srgbClr val="F4F1EA"/>
+                  <a:srgbClr val="A63D24"/>
                 </a:solidFill>
                 <a:latin typeface="맑은 고딕" pitchFamily="34" charset="0"/>
                 <a:ea typeface="맑은 고딕" pitchFamily="34" charset="-122"/>
@@ -3296,7 +3134,7 @@
             <a:r>
               <a:rPr lang="ko-KR" altLang="en-US" sz="1500" dirty="0">
                 <a:solidFill>
-                  <a:srgbClr val="B9BCC6"/>
+                  <a:srgbClr val="555A66"/>
                 </a:solidFill>
                 <a:latin typeface="맑은 고딕" pitchFamily="34" charset="0"/>
                 <a:ea typeface="맑은 고딕" pitchFamily="34" charset="-122"/>
@@ -3316,7 +3154,7 @@
             <a:r>
               <a:rPr lang="ko-KR" altLang="en-US" sz="1500" dirty="0">
                 <a:solidFill>
-                  <a:srgbClr val="B9BCC6"/>
+                  <a:srgbClr val="555A66"/>
                 </a:solidFill>
                 <a:latin typeface="맑은 고딕" pitchFamily="34" charset="0"/>
                 <a:ea typeface="맑은 고딕" pitchFamily="34" charset="-122"/>
@@ -3595,7 +3433,7 @@
             </a:avLst>
           </a:prstGeom>
           <a:solidFill>
-            <a:srgbClr val="1B1F2A"/>
+            <a:srgbClr val="EFE2DA"/>
           </a:solidFill>
           <a:ln/>
         </p:spPr>
@@ -3630,7 +3468,7 @@
             <a:r>
               <a:rPr lang="ko-KR" altLang="en-US" sz="1200" b="1" dirty="0">
                 <a:solidFill>
-                  <a:srgbClr val="E08A6B"/>
+                  <a:srgbClr val="A63D24"/>
                 </a:solidFill>
                 <a:latin typeface="맑은 고딕" pitchFamily="34" charset="0"/>
                 <a:ea typeface="맑은 고딕" pitchFamily="34" charset="-122"/>
@@ -3672,7 +3510,7 @@
             <a:r>
               <a:rPr lang="ko-KR" altLang="en-US" sz="2000" b="1" dirty="0">
                 <a:solidFill>
-                  <a:srgbClr val="F4F1EA"/>
+                  <a:srgbClr val="1B1F2A"/>
                 </a:solidFill>
                 <a:latin typeface="바탕" pitchFamily="34" charset="0"/>
                 <a:ea typeface="바탕" pitchFamily="34" charset="-122"/>
@@ -3714,7 +3552,7 @@
             <a:r>
               <a:rPr lang="ko-KR" altLang="en-US" sz="1400" dirty="0">
                 <a:solidFill>
-                  <a:srgbClr val="B9BCC6"/>
+                  <a:srgbClr val="555A66"/>
                 </a:solidFill>
                 <a:latin typeface="맑은 고딕" pitchFamily="34" charset="0"/>
                 <a:ea typeface="맑은 고딕" pitchFamily="34" charset="-122"/>
@@ -4652,7 +4490,7 @@
             </a:avLst>
           </a:prstGeom>
           <a:solidFill>
-            <a:srgbClr val="1B1F2A"/>
+            <a:srgbClr val="E4EAF0"/>
           </a:solidFill>
           <a:ln/>
         </p:spPr>
@@ -4687,7 +4525,7 @@
             <a:r>
               <a:rPr lang="ko-KR" altLang="en-US" sz="1700" b="1" dirty="0">
                 <a:solidFill>
-                  <a:srgbClr val="F4F1EA"/>
+                  <a:srgbClr val="1B1F2A"/>
                 </a:solidFill>
                 <a:latin typeface="바탕" pitchFamily="34" charset="0"/>
                 <a:ea typeface="바탕" pitchFamily="34" charset="-122"/>
@@ -4729,7 +4567,7 @@
             <a:r>
               <a:rPr lang="ko-KR" altLang="en-US" sz="1300" dirty="0">
                 <a:solidFill>
-                  <a:srgbClr val="B9BCC6"/>
+                  <a:srgbClr val="2F5D8A"/>
                 </a:solidFill>
                 <a:latin typeface="맑은 고딕" pitchFamily="34" charset="0"/>
                 <a:ea typeface="맑은 고딕" pitchFamily="34" charset="-122"/>
@@ -5428,7 +5266,7 @@
             </a:avLst>
           </a:prstGeom>
           <a:solidFill>
-            <a:srgbClr val="1B1F2A"/>
+            <a:srgbClr val="EFE2DA"/>
           </a:solidFill>
           <a:ln/>
         </p:spPr>
@@ -5463,7 +5301,7 @@
             <a:r>
               <a:rPr lang="ko-KR" altLang="en-US" sz="1200" b="1" dirty="0">
                 <a:solidFill>
-                  <a:srgbClr val="E08A6B"/>
+                  <a:srgbClr val="A63D24"/>
                 </a:solidFill>
                 <a:latin typeface="맑은 고딕" pitchFamily="34" charset="0"/>
                 <a:ea typeface="맑은 고딕" pitchFamily="34" charset="-122"/>
@@ -5505,7 +5343,7 @@
             <a:r>
               <a:rPr lang="ko-KR" altLang="en-US" sz="1700" b="1" dirty="0">
                 <a:solidFill>
-                  <a:srgbClr val="F4F1EA"/>
+                  <a:srgbClr val="1B1F2A"/>
                 </a:solidFill>
                 <a:latin typeface="바탕" pitchFamily="34" charset="0"/>
                 <a:ea typeface="바탕" pitchFamily="34" charset="-122"/>
@@ -5712,7 +5550,7 @@
                       <a:r>
                         <a:rPr lang="ko-KR" altLang="en-US" sz="1400" b="1" dirty="0">
                           <a:solidFill>
-                            <a:srgbClr val="F4F1EA"/>
+                            <a:srgbClr val="A63D24"/>
                           </a:solidFill>
                           <a:latin typeface="맑은 고딕" pitchFamily="34" charset="0"/>
                           <a:ea typeface="맑은 고딕" pitchFamily="34" charset="-122"/>
@@ -5765,7 +5603,7 @@
                       <a:tailEnd type="none" w="med" len="med"/>
                     </a:lnB>
                     <a:solidFill>
-                      <a:srgbClr val="1B1F2A"/>
+                      <a:srgbClr val="EFE2DA"/>
                     </a:solidFill>
                   </a:tcPr>
                 </a:tc>
@@ -5780,7 +5618,7 @@
                       <a:r>
                         <a:rPr lang="ko-KR" altLang="en-US" sz="1400" b="1" dirty="0">
                           <a:solidFill>
-                            <a:srgbClr val="F4F1EA"/>
+                            <a:srgbClr val="A63D24"/>
                           </a:solidFill>
                           <a:latin typeface="맑은 고딕" pitchFamily="34" charset="0"/>
                           <a:ea typeface="맑은 고딕" pitchFamily="34" charset="-122"/>
@@ -5833,7 +5671,7 @@
                       <a:tailEnd type="none" w="med" len="med"/>
                     </a:lnB>
                     <a:solidFill>
-                      <a:srgbClr val="1B1F2A"/>
+                      <a:srgbClr val="EFE2DA"/>
                     </a:solidFill>
                   </a:tcPr>
                 </a:tc>
@@ -5848,7 +5686,7 @@
                       <a:r>
                         <a:rPr lang="ko-KR" altLang="en-US" sz="1400" b="1" dirty="0">
                           <a:solidFill>
-                            <a:srgbClr val="F4F1EA"/>
+                            <a:srgbClr val="A63D24"/>
                           </a:solidFill>
                           <a:latin typeface="맑은 고딕" pitchFamily="34" charset="0"/>
                           <a:ea typeface="맑은 고딕" pitchFamily="34" charset="-122"/>
@@ -5901,7 +5739,7 @@
                       <a:tailEnd type="none" w="med" len="med"/>
                     </a:lnB>
                     <a:solidFill>
-                      <a:srgbClr val="1B1F2A"/>
+                      <a:srgbClr val="EFE2DA"/>
                     </a:solidFill>
                   </a:tcPr>
                 </a:tc>
@@ -10255,7 +10093,7 @@
                       <a:r>
                         <a:rPr lang="ko-KR" altLang="en-US" sz="1300" b="1" dirty="0">
                           <a:solidFill>
-                            <a:srgbClr val="F4F1EA"/>
+                            <a:srgbClr val="A63D24"/>
                           </a:solidFill>
                           <a:latin typeface="맑은 고딕" pitchFamily="34" charset="0"/>
                           <a:ea typeface="맑은 고딕" pitchFamily="34" charset="-122"/>
@@ -10308,7 +10146,7 @@
                       <a:tailEnd type="none" w="med" len="med"/>
                     </a:lnB>
                     <a:solidFill>
-                      <a:srgbClr val="1B1F2A"/>
+                      <a:srgbClr val="EFE2DA"/>
                     </a:solidFill>
                   </a:tcPr>
                 </a:tc>
@@ -10323,7 +10161,7 @@
                       <a:r>
                         <a:rPr lang="ko-KR" altLang="en-US" sz="1300" b="1" dirty="0">
                           <a:solidFill>
-                            <a:srgbClr val="F4F1EA"/>
+                            <a:srgbClr val="A63D24"/>
                           </a:solidFill>
                           <a:latin typeface="맑은 고딕" pitchFamily="34" charset="0"/>
                           <a:ea typeface="맑은 고딕" pitchFamily="34" charset="-122"/>
@@ -10376,7 +10214,7 @@
                       <a:tailEnd type="none" w="med" len="med"/>
                     </a:lnB>
                     <a:solidFill>
-                      <a:srgbClr val="1B1F2A"/>
+                      <a:srgbClr val="EFE2DA"/>
                     </a:solidFill>
                   </a:tcPr>
                 </a:tc>
@@ -10391,7 +10229,7 @@
                       <a:r>
                         <a:rPr lang="ko-KR" altLang="en-US" sz="1300" b="1" dirty="0">
                           <a:solidFill>
-                            <a:srgbClr val="F4F1EA"/>
+                            <a:srgbClr val="A63D24"/>
                           </a:solidFill>
                           <a:latin typeface="맑은 고딕" pitchFamily="34" charset="0"/>
                           <a:ea typeface="맑은 고딕" pitchFamily="34" charset="-122"/>
@@ -10444,7 +10282,7 @@
                       <a:tailEnd type="none" w="med" len="med"/>
                     </a:lnB>
                     <a:solidFill>
-                      <a:srgbClr val="1B1F2A"/>
+                      <a:srgbClr val="EFE2DA"/>
                     </a:solidFill>
                   </a:tcPr>
                 </a:tc>
@@ -12284,7 +12122,7 @@
             <a:r>
               <a:rPr lang="ko-KR" altLang="en-US" sz="1200" b="1" dirty="0">
                 <a:solidFill>
-                  <a:srgbClr val="F6DCCF"/>
+                  <a:srgbClr val="A63D24"/>
                 </a:solidFill>
                 <a:latin typeface="맑은 고딕" pitchFamily="34" charset="0"/>
                 <a:ea typeface="맑은 고딕" pitchFamily="34" charset="-122"/>
@@ -12325,7 +12163,7 @@
             <a:r>
               <a:rPr lang="ko-KR" altLang="en-US" sz="3200" b="1" dirty="0">
                 <a:solidFill>
-                  <a:srgbClr val="FBF9F4"/>
+                  <a:srgbClr val="1B1F2A"/>
                 </a:solidFill>
                 <a:latin typeface="바탕" pitchFamily="34" charset="0"/>
                 <a:ea typeface="바탕" pitchFamily="34" charset="-122"/>
@@ -12354,7 +12192,7 @@
             </a:avLst>
           </a:prstGeom>
           <a:solidFill>
-            <a:srgbClr val="8A3019"/>
+            <a:srgbClr val="EFE2DA"/>
           </a:solidFill>
           <a:ln/>
         </p:spPr>
@@ -12389,7 +12227,7 @@
             <a:r>
               <a:rPr lang="ko-KR" altLang="en-US" sz="1800" b="1" dirty="0">
                 <a:solidFill>
-                  <a:srgbClr val="FBF9F4"/>
+                  <a:srgbClr val="A63D24"/>
                 </a:solidFill>
                 <a:latin typeface="맑은 고딕" pitchFamily="34" charset="0"/>
                 <a:ea typeface="맑은 고딕" pitchFamily="34" charset="-122"/>
@@ -12431,7 +12269,7 @@
             <a:r>
               <a:rPr lang="ko-KR" altLang="en-US" sz="1400" dirty="0">
                 <a:solidFill>
-                  <a:srgbClr val="F6DCCF"/>
+                  <a:srgbClr val="1B1F2A"/>
                 </a:solidFill>
                 <a:latin typeface="맑은 고딕" pitchFamily="34" charset="0"/>
                 <a:ea typeface="맑은 고딕" pitchFamily="34" charset="-122"/>
@@ -12460,7 +12298,7 @@
             </a:avLst>
           </a:prstGeom>
           <a:solidFill>
-            <a:srgbClr val="8A3019"/>
+            <a:srgbClr val="EFE2DA"/>
           </a:solidFill>
           <a:ln/>
         </p:spPr>
@@ -12495,7 +12333,7 @@
             <a:r>
               <a:rPr lang="ko-KR" altLang="en-US" sz="1800" b="1" dirty="0">
                 <a:solidFill>
-                  <a:srgbClr val="FBF9F4"/>
+                  <a:srgbClr val="A63D24"/>
                 </a:solidFill>
                 <a:latin typeface="맑은 고딕" pitchFamily="34" charset="0"/>
                 <a:ea typeface="맑은 고딕" pitchFamily="34" charset="-122"/>
@@ -12537,7 +12375,7 @@
             <a:r>
               <a:rPr lang="ko-KR" altLang="en-US" sz="1400" dirty="0">
                 <a:solidFill>
-                  <a:srgbClr val="F6DCCF"/>
+                  <a:srgbClr val="1B1F2A"/>
                 </a:solidFill>
                 <a:latin typeface="맑은 고딕" pitchFamily="34" charset="0"/>
                 <a:ea typeface="맑은 고딕" pitchFamily="34" charset="-122"/>
@@ -12566,7 +12404,7 @@
             </a:avLst>
           </a:prstGeom>
           <a:solidFill>
-            <a:srgbClr val="8A3019"/>
+            <a:srgbClr val="EFE2DA"/>
           </a:solidFill>
           <a:ln/>
         </p:spPr>
@@ -12601,7 +12439,7 @@
             <a:r>
               <a:rPr lang="ko-KR" altLang="en-US" sz="1800" b="1" dirty="0">
                 <a:solidFill>
-                  <a:srgbClr val="FBF9F4"/>
+                  <a:srgbClr val="A63D24"/>
                 </a:solidFill>
                 <a:latin typeface="맑은 고딕" pitchFamily="34" charset="0"/>
                 <a:ea typeface="맑은 고딕" pitchFamily="34" charset="-122"/>
@@ -12643,7 +12481,7 @@
             <a:r>
               <a:rPr lang="ko-KR" altLang="en-US" sz="1400" dirty="0">
                 <a:solidFill>
-                  <a:srgbClr val="F6DCCF"/>
+                  <a:srgbClr val="1B1F2A"/>
                 </a:solidFill>
                 <a:latin typeface="맑은 고딕" pitchFamily="34" charset="0"/>
                 <a:ea typeface="맑은 고딕" pitchFamily="34" charset="-122"/>
@@ -12672,7 +12510,7 @@
             </a:avLst>
           </a:prstGeom>
           <a:solidFill>
-            <a:srgbClr val="8A3019"/>
+            <a:srgbClr val="EFE2DA"/>
           </a:solidFill>
           <a:ln/>
         </p:spPr>
@@ -12707,7 +12545,7 @@
             <a:r>
               <a:rPr lang="ko-KR" altLang="en-US" sz="1800" b="1" dirty="0">
                 <a:solidFill>
-                  <a:srgbClr val="FBF9F4"/>
+                  <a:srgbClr val="A63D24"/>
                 </a:solidFill>
                 <a:latin typeface="맑은 고딕" pitchFamily="34" charset="0"/>
                 <a:ea typeface="맑은 고딕" pitchFamily="34" charset="-122"/>
@@ -12749,7 +12587,7 @@
             <a:r>
               <a:rPr lang="ko-KR" altLang="en-US" sz="1400" dirty="0">
                 <a:solidFill>
-                  <a:srgbClr val="F6DCCF"/>
+                  <a:srgbClr val="1B1F2A"/>
                 </a:solidFill>
                 <a:latin typeface="맑은 고딕" pitchFamily="34" charset="0"/>
                 <a:ea typeface="맑은 고딕" pitchFamily="34" charset="-122"/>
@@ -12791,7 +12629,7 @@
             <a:lvl1pPr>
               <a:defRPr sz="1200">
                 <a:solidFill>
-                  <a:srgbClr val="F6DCCF"/>
+                  <a:srgbClr val="555A66"/>
                 </a:solidFill>
                 <a:latin typeface="맑은 고딕"/>
                 <a:ea typeface="맑은 고딕"/>
@@ -13206,7 +13044,7 @@
             <a:r>
               <a:rPr lang="ko-KR" altLang="en-US" sz="1200" b="1" dirty="0">
                 <a:solidFill>
-                  <a:srgbClr val="E08A6B"/>
+                  <a:srgbClr val="A63D24"/>
                 </a:solidFill>
                 <a:latin typeface="맑은 고딕" pitchFamily="34" charset="0"/>
                 <a:ea typeface="맑은 고딕" pitchFamily="34" charset="-122"/>
@@ -13248,7 +13086,7 @@
             <a:r>
               <a:rPr lang="ko-KR" altLang="en-US" sz="3600" b="1" dirty="0">
                 <a:solidFill>
-                  <a:srgbClr val="F4F1EA"/>
+                  <a:srgbClr val="1B1F2A"/>
                 </a:solidFill>
                 <a:latin typeface="바탕" pitchFamily="34" charset="0"/>
                 <a:ea typeface="바탕" pitchFamily="34" charset="-122"/>
@@ -13268,7 +13106,7 @@
             <a:r>
               <a:rPr lang="ko-KR" altLang="en-US" sz="3600" b="1" dirty="0">
                 <a:solidFill>
-                  <a:srgbClr val="F4F1EA"/>
+                  <a:srgbClr val="1B1F2A"/>
                 </a:solidFill>
                 <a:latin typeface="바탕" pitchFamily="34" charset="0"/>
                 <a:ea typeface="바탕" pitchFamily="34" charset="-122"/>
@@ -13310,7 +13148,7 @@
             <a:r>
               <a:rPr lang="ko-KR" altLang="en-US" sz="1300" dirty="0">
                 <a:solidFill>
-                  <a:srgbClr val="B9BCC6"/>
+                  <a:srgbClr val="555A66"/>
                 </a:solidFill>
                 <a:latin typeface="맑은 고딕" pitchFamily="34" charset="0"/>
                 <a:ea typeface="맑은 고딕" pitchFamily="34" charset="-122"/>
@@ -13352,7 +13190,7 @@
             <a:r>
               <a:rPr lang="ko-KR" altLang="en-US" sz="2200" b="1" dirty="0">
                 <a:solidFill>
-                  <a:srgbClr val="F4F1EA"/>
+                  <a:srgbClr val="1B1F2A"/>
                 </a:solidFill>
                 <a:latin typeface="맑은 고딕" pitchFamily="34" charset="0"/>
                 <a:ea typeface="맑은 고딕" pitchFamily="34" charset="-122"/>
@@ -13369,7 +13207,7 @@
             <a:r>
               <a:rPr lang="ko-KR" altLang="en-US" sz="2200" b="1" dirty="0">
                 <a:solidFill>
-                  <a:srgbClr val="E08A6B"/>
+                  <a:srgbClr val="A63D24"/>
                 </a:solidFill>
                 <a:latin typeface="맑은 고딕" pitchFamily="34" charset="0"/>
                 <a:ea typeface="맑은 고딕" pitchFamily="34" charset="-122"/>
@@ -13411,7 +13249,7 @@
             <a:r>
               <a:rPr lang="ko-KR" altLang="en-US" sz="1500" dirty="0">
                 <a:solidFill>
-                  <a:srgbClr val="B9BCC6"/>
+                  <a:srgbClr val="555A66"/>
                 </a:solidFill>
                 <a:latin typeface="맑은 고딕" pitchFamily="34" charset="0"/>
                 <a:ea typeface="맑은 고딕" pitchFamily="34" charset="-122"/>
@@ -13690,7 +13528,7 @@
             </a:avLst>
           </a:prstGeom>
           <a:solidFill>
-            <a:srgbClr val="1B1F2A"/>
+            <a:srgbClr val="EFE2DA"/>
           </a:solidFill>
           <a:ln/>
         </p:spPr>
@@ -13725,7 +13563,7 @@
             <a:r>
               <a:rPr lang="ko-KR" altLang="en-US" sz="1200" b="1" dirty="0">
                 <a:solidFill>
-                  <a:srgbClr val="E08A6B"/>
+                  <a:srgbClr val="A63D24"/>
                 </a:solidFill>
                 <a:latin typeface="맑은 고딕" pitchFamily="34" charset="0"/>
                 <a:ea typeface="맑은 고딕" pitchFamily="34" charset="-122"/>
@@ -13767,7 +13605,7 @@
             <a:r>
               <a:rPr lang="ko-KR" altLang="en-US" sz="2200" b="1" dirty="0">
                 <a:solidFill>
-                  <a:srgbClr val="F4F1EA"/>
+                  <a:srgbClr val="1B1F2A"/>
                 </a:solidFill>
                 <a:latin typeface="바탕" pitchFamily="34" charset="0"/>
                 <a:ea typeface="바탕" pitchFamily="34" charset="-122"/>
@@ -13809,7 +13647,7 @@
             <a:r>
               <a:rPr lang="ko-KR" altLang="en-US" sz="1300" dirty="0">
                 <a:solidFill>
-                  <a:srgbClr val="B9BCC6"/>
+                  <a:srgbClr val="555A66"/>
                 </a:solidFill>
                 <a:latin typeface="맑은 고딕" pitchFamily="34" charset="0"/>
                 <a:ea typeface="맑은 고딕" pitchFamily="34" charset="-122"/>
@@ -13924,7 +13762,7 @@
             <a:r>
               <a:rPr lang="ko-KR" altLang="en-US" sz="1200" b="1" dirty="0">
                 <a:solidFill>
-                  <a:srgbClr val="E08A6B"/>
+                  <a:srgbClr val="A63D24"/>
                 </a:solidFill>
                 <a:latin typeface="맑은 고딕" pitchFamily="34" charset="0"/>
                 <a:ea typeface="맑은 고딕" pitchFamily="34" charset="-122"/>
@@ -13966,7 +13804,7 @@
             <a:r>
               <a:rPr lang="ko-KR" altLang="en-US" sz="3200" b="1" dirty="0">
                 <a:solidFill>
-                  <a:srgbClr val="F4F1EA"/>
+                  <a:srgbClr val="1B1F2A"/>
                 </a:solidFill>
                 <a:latin typeface="바탕" pitchFamily="34" charset="0"/>
                 <a:ea typeface="바탕" pitchFamily="34" charset="-122"/>
@@ -14008,7 +13846,7 @@
             <a:r>
               <a:rPr lang="ko-KR" altLang="en-US" sz="1400" dirty="0">
                 <a:solidFill>
-                  <a:srgbClr val="B9BCC6"/>
+                  <a:srgbClr val="555A66"/>
                 </a:solidFill>
                 <a:latin typeface="맑은 고딕" pitchFamily="34" charset="0"/>
                 <a:ea typeface="맑은 고딕" pitchFamily="34" charset="-122"/>
@@ -14037,7 +13875,7 @@
             </a:avLst>
           </a:prstGeom>
           <a:solidFill>
-            <a:srgbClr val="262B38"/>
+            <a:srgbClr val="EFE2DA"/>
           </a:solidFill>
           <a:ln/>
         </p:spPr>
@@ -14072,7 +13910,7 @@
             <a:r>
               <a:rPr lang="ko-KR" altLang="en-US" sz="1600" dirty="0">
                 <a:solidFill>
-                  <a:srgbClr val="F4F1EA"/>
+                  <a:srgbClr val="1B1F2A"/>
                 </a:solidFill>
                 <a:latin typeface="맑은 고딕" pitchFamily="34" charset="0"/>
                 <a:ea typeface="맑은 고딕" pitchFamily="34" charset="-122"/>
@@ -14089,7 +13927,7 @@
             <a:r>
               <a:rPr lang="ko-KR" altLang="en-US" sz="1600" b="1" dirty="0">
                 <a:solidFill>
-                  <a:srgbClr val="F4F1EA"/>
+                  <a:srgbClr val="1B1F2A"/>
                 </a:solidFill>
                 <a:latin typeface="맑은 고딕" pitchFamily="34" charset="0"/>
                 <a:ea typeface="맑은 고딕" pitchFamily="34" charset="-122"/>
@@ -14106,7 +13944,7 @@
             <a:r>
               <a:rPr lang="ko-KR" altLang="en-US" sz="1600" dirty="0">
                 <a:solidFill>
-                  <a:srgbClr val="F4F1EA"/>
+                  <a:srgbClr val="1B1F2A"/>
                 </a:solidFill>
                 <a:latin typeface="맑은 고딕" pitchFamily="34" charset="0"/>
                 <a:ea typeface="맑은 고딕" pitchFamily="34" charset="-122"/>
@@ -14148,7 +13986,7 @@
             <a:r>
               <a:rPr lang="ko-KR" altLang="en-US" sz="1600" dirty="0">
                 <a:solidFill>
-                  <a:srgbClr val="B9BCC6"/>
+                  <a:srgbClr val="555A66"/>
                 </a:solidFill>
                 <a:latin typeface="맑은 고딕" pitchFamily="34" charset="0"/>
                 <a:ea typeface="맑은 고딕" pitchFamily="34" charset="-122"/>
@@ -14897,7 +14735,7 @@
             </a:avLst>
           </a:prstGeom>
           <a:solidFill>
-            <a:srgbClr val="1B1F2A"/>
+            <a:srgbClr val="EFE2DA"/>
           </a:solidFill>
           <a:ln/>
         </p:spPr>
@@ -14932,7 +14770,7 @@
             <a:r>
               <a:rPr lang="ko-KR" altLang="en-US" sz="2200" b="1" dirty="0">
                 <a:solidFill>
-                  <a:srgbClr val="E08A6B"/>
+                  <a:srgbClr val="A63D24"/>
                 </a:solidFill>
                 <a:latin typeface="바탕" pitchFamily="34" charset="0"/>
                 <a:ea typeface="바탕" pitchFamily="34" charset="-122"/>
@@ -14974,7 +14812,7 @@
             <a:r>
               <a:rPr lang="ko-KR" altLang="en-US" sz="1600" b="1" dirty="0">
                 <a:solidFill>
-                  <a:srgbClr val="F4F1EA"/>
+                  <a:srgbClr val="1B1F2A"/>
                 </a:solidFill>
                 <a:latin typeface="맑은 고딕" pitchFamily="34" charset="0"/>
                 <a:ea typeface="맑은 고딕" pitchFamily="34" charset="-122"/>
@@ -15016,7 +14854,7 @@
             <a:r>
               <a:rPr lang="ko-KR" altLang="en-US" sz="1300" dirty="0">
                 <a:solidFill>
-                  <a:srgbClr val="B9BCC6"/>
+                  <a:srgbClr val="555A66"/>
                 </a:solidFill>
                 <a:latin typeface="맑은 고딕" pitchFamily="34" charset="0"/>
                 <a:ea typeface="맑은 고딕" pitchFamily="34" charset="-122"/>
@@ -16972,7 +16810,7 @@
             </a:avLst>
           </a:prstGeom>
           <a:solidFill>
-            <a:srgbClr val="A63D24"/>
+            <a:srgbClr val="EFE2DA"/>
           </a:solidFill>
           <a:ln/>
         </p:spPr>
@@ -17007,7 +16845,7 @@
             <a:r>
               <a:rPr lang="ko-KR" altLang="en-US" sz="1200" b="1" dirty="0">
                 <a:solidFill>
-                  <a:srgbClr val="FBF9F4"/>
+                  <a:srgbClr val="A63D24"/>
                 </a:solidFill>
                 <a:latin typeface="맑은 고딕" pitchFamily="34" charset="0"/>
                 <a:ea typeface="맑은 고딕" pitchFamily="34" charset="-122"/>
@@ -17049,7 +16887,7 @@
             <a:r>
               <a:rPr lang="ko-KR" altLang="en-US" sz="1300" dirty="0">
                 <a:solidFill>
-                  <a:srgbClr val="FBF9F4"/>
+                  <a:srgbClr val="1B1F2A"/>
                 </a:solidFill>
                 <a:latin typeface="맑은 고딕" pitchFamily="34" charset="0"/>
                 <a:ea typeface="맑은 고딕" pitchFamily="34" charset="-122"/>
@@ -17078,7 +16916,7 @@
             </a:avLst>
           </a:prstGeom>
           <a:solidFill>
-            <a:srgbClr val="A63D24"/>
+            <a:srgbClr val="EFE2DA"/>
           </a:solidFill>
           <a:ln/>
         </p:spPr>
@@ -17113,7 +16951,7 @@
             <a:r>
               <a:rPr lang="ko-KR" altLang="en-US" sz="1200" b="1" dirty="0">
                 <a:solidFill>
-                  <a:srgbClr val="FBF9F4"/>
+                  <a:srgbClr val="A63D24"/>
                 </a:solidFill>
                 <a:latin typeface="맑은 고딕" pitchFamily="34" charset="0"/>
                 <a:ea typeface="맑은 고딕" pitchFamily="34" charset="-122"/>
@@ -17155,7 +16993,7 @@
             <a:r>
               <a:rPr lang="ko-KR" altLang="en-US" sz="1300" dirty="0">
                 <a:solidFill>
-                  <a:srgbClr val="FBF9F4"/>
+                  <a:srgbClr val="1B1F2A"/>
                 </a:solidFill>
                 <a:latin typeface="맑은 고딕" pitchFamily="34" charset="0"/>
                 <a:ea typeface="맑은 고딕" pitchFamily="34" charset="-122"/>
@@ -17184,7 +17022,7 @@
             </a:avLst>
           </a:prstGeom>
           <a:solidFill>
-            <a:srgbClr val="A63D24"/>
+            <a:srgbClr val="EFE2DA"/>
           </a:solidFill>
           <a:ln/>
         </p:spPr>
@@ -17219,7 +17057,7 @@
             <a:r>
               <a:rPr lang="ko-KR" altLang="en-US" sz="1200" b="1" dirty="0">
                 <a:solidFill>
-                  <a:srgbClr val="FBF9F4"/>
+                  <a:srgbClr val="A63D24"/>
                 </a:solidFill>
                 <a:latin typeface="맑은 고딕" pitchFamily="34" charset="0"/>
                 <a:ea typeface="맑은 고딕" pitchFamily="34" charset="-122"/>
@@ -17261,7 +17099,7 @@
             <a:r>
               <a:rPr lang="ko-KR" altLang="en-US" sz="1300" dirty="0">
                 <a:solidFill>
-                  <a:srgbClr val="FBF9F4"/>
+                  <a:srgbClr val="1B1F2A"/>
                 </a:solidFill>
                 <a:latin typeface="맑은 고딕" pitchFamily="34" charset="0"/>
                 <a:ea typeface="맑은 고딕" pitchFamily="34" charset="-122"/>
@@ -17290,7 +17128,7 @@
             </a:avLst>
           </a:prstGeom>
           <a:solidFill>
-            <a:srgbClr val="A63D24"/>
+            <a:srgbClr val="EFE2DA"/>
           </a:solidFill>
           <a:ln/>
         </p:spPr>
@@ -17325,7 +17163,7 @@
             <a:r>
               <a:rPr lang="ko-KR" altLang="en-US" sz="1200" b="1" dirty="0">
                 <a:solidFill>
-                  <a:srgbClr val="FBF9F4"/>
+                  <a:srgbClr val="A63D24"/>
                 </a:solidFill>
                 <a:latin typeface="맑은 고딕" pitchFamily="34" charset="0"/>
                 <a:ea typeface="맑은 고딕" pitchFamily="34" charset="-122"/>
@@ -17367,7 +17205,7 @@
             <a:r>
               <a:rPr lang="ko-KR" altLang="en-US" sz="1300" dirty="0">
                 <a:solidFill>
-                  <a:srgbClr val="FBF9F4"/>
+                  <a:srgbClr val="1B1F2A"/>
                 </a:solidFill>
                 <a:latin typeface="맑은 고딕" pitchFamily="34" charset="0"/>
                 <a:ea typeface="맑은 고딕" pitchFamily="34" charset="-122"/>
@@ -17396,7 +17234,7 @@
             </a:avLst>
           </a:prstGeom>
           <a:solidFill>
-            <a:srgbClr val="A63D24"/>
+            <a:srgbClr val="EFE2DA"/>
           </a:solidFill>
           <a:ln/>
         </p:spPr>
@@ -17431,7 +17269,7 @@
             <a:r>
               <a:rPr lang="ko-KR" altLang="en-US" sz="1200" b="1" dirty="0">
                 <a:solidFill>
-                  <a:srgbClr val="FBF9F4"/>
+                  <a:srgbClr val="A63D24"/>
                 </a:solidFill>
                 <a:latin typeface="맑은 고딕" pitchFamily="34" charset="0"/>
                 <a:ea typeface="맑은 고딕" pitchFamily="34" charset="-122"/>
@@ -17473,7 +17311,7 @@
             <a:r>
               <a:rPr lang="ko-KR" altLang="en-US" sz="1300" dirty="0">
                 <a:solidFill>
-                  <a:srgbClr val="FBF9F4"/>
+                  <a:srgbClr val="1B1F2A"/>
                 </a:solidFill>
                 <a:latin typeface="맑은 고딕" pitchFamily="34" charset="0"/>
                 <a:ea typeface="맑은 고딕" pitchFamily="34" charset="-122"/>
@@ -17502,7 +17340,7 @@
             </a:avLst>
           </a:prstGeom>
           <a:solidFill>
-            <a:srgbClr val="A63D24"/>
+            <a:srgbClr val="EFE2DA"/>
           </a:solidFill>
           <a:ln/>
         </p:spPr>
@@ -17537,7 +17375,7 @@
             <a:r>
               <a:rPr lang="ko-KR" altLang="en-US" sz="1200" b="1" dirty="0">
                 <a:solidFill>
-                  <a:srgbClr val="FBF9F4"/>
+                  <a:srgbClr val="A63D24"/>
                 </a:solidFill>
                 <a:latin typeface="맑은 고딕" pitchFamily="34" charset="0"/>
                 <a:ea typeface="맑은 고딕" pitchFamily="34" charset="-122"/>
@@ -17579,7 +17417,7 @@
             <a:r>
               <a:rPr lang="ko-KR" altLang="en-US" sz="1300" dirty="0">
                 <a:solidFill>
-                  <a:srgbClr val="FBF9F4"/>
+                  <a:srgbClr val="1B1F2A"/>
                 </a:solidFill>
                 <a:latin typeface="맑은 고딕" pitchFamily="34" charset="0"/>
                 <a:ea typeface="맑은 고딕" pitchFamily="34" charset="-122"/>
@@ -17608,7 +17446,7 @@
             </a:avLst>
           </a:prstGeom>
           <a:solidFill>
-            <a:srgbClr val="A63D24"/>
+            <a:srgbClr val="EFE2DA"/>
           </a:solidFill>
           <a:ln/>
         </p:spPr>
@@ -17643,7 +17481,7 @@
             <a:r>
               <a:rPr lang="ko-KR" altLang="en-US" sz="1200" b="1" dirty="0">
                 <a:solidFill>
-                  <a:srgbClr val="FBF9F4"/>
+                  <a:srgbClr val="A63D24"/>
                 </a:solidFill>
                 <a:latin typeface="맑은 고딕" pitchFamily="34" charset="0"/>
                 <a:ea typeface="맑은 고딕" pitchFamily="34" charset="-122"/>
@@ -17685,7 +17523,7 @@
             <a:r>
               <a:rPr lang="ko-KR" altLang="en-US" sz="1300" dirty="0">
                 <a:solidFill>
-                  <a:srgbClr val="FBF9F4"/>
+                  <a:srgbClr val="1B1F2A"/>
                 </a:solidFill>
                 <a:latin typeface="맑은 고딕" pitchFamily="34" charset="0"/>
                 <a:ea typeface="맑은 고딕" pitchFamily="34" charset="-122"/>
@@ -17714,7 +17552,7 @@
             </a:avLst>
           </a:prstGeom>
           <a:solidFill>
-            <a:srgbClr val="A63D24"/>
+            <a:srgbClr val="EFE2DA"/>
           </a:solidFill>
           <a:ln/>
         </p:spPr>
@@ -17749,7 +17587,7 @@
             <a:r>
               <a:rPr lang="ko-KR" altLang="en-US" sz="1200" b="1" dirty="0">
                 <a:solidFill>
-                  <a:srgbClr val="FBF9F4"/>
+                  <a:srgbClr val="A63D24"/>
                 </a:solidFill>
                 <a:latin typeface="맑은 고딕" pitchFamily="34" charset="0"/>
                 <a:ea typeface="맑은 고딕" pitchFamily="34" charset="-122"/>
@@ -17791,7 +17629,7 @@
             <a:r>
               <a:rPr lang="ko-KR" altLang="en-US" sz="1300" dirty="0">
                 <a:solidFill>
-                  <a:srgbClr val="FBF9F4"/>
+                  <a:srgbClr val="1B1F2A"/>
                 </a:solidFill>
                 <a:latin typeface="맑은 고딕" pitchFamily="34" charset="0"/>
                 <a:ea typeface="맑은 고딕" pitchFamily="34" charset="-122"/>
@@ -17820,7 +17658,7 @@
             </a:avLst>
           </a:prstGeom>
           <a:solidFill>
-            <a:srgbClr val="A63D24"/>
+            <a:srgbClr val="EFE2DA"/>
           </a:solidFill>
           <a:ln/>
         </p:spPr>
@@ -17855,7 +17693,7 @@
             <a:r>
               <a:rPr lang="ko-KR" altLang="en-US" sz="1200" b="1" dirty="0">
                 <a:solidFill>
-                  <a:srgbClr val="FBF9F4"/>
+                  <a:srgbClr val="A63D24"/>
                 </a:solidFill>
                 <a:latin typeface="맑은 고딕" pitchFamily="34" charset="0"/>
                 <a:ea typeface="맑은 고딕" pitchFamily="34" charset="-122"/>
@@ -17897,7 +17735,7 @@
             <a:r>
               <a:rPr lang="ko-KR" altLang="en-US" sz="1300" dirty="0">
                 <a:solidFill>
-                  <a:srgbClr val="FBF9F4"/>
+                  <a:srgbClr val="1B1F2A"/>
                 </a:solidFill>
                 <a:latin typeface="맑은 고딕" pitchFamily="34" charset="0"/>
                 <a:ea typeface="맑은 고딕" pitchFamily="34" charset="-122"/>
@@ -18037,7 +17875,7 @@
             </a:avLst>
           </a:prstGeom>
           <a:solidFill>
-            <a:srgbClr val="A63D24"/>
+            <a:srgbClr val="EFE2DA"/>
           </a:solidFill>
           <a:ln/>
         </p:spPr>
@@ -18072,7 +17910,7 @@
             <a:r>
               <a:rPr lang="ko-KR" altLang="en-US" sz="1200" b="1" dirty="0">
                 <a:solidFill>
-                  <a:srgbClr val="FBF9F4"/>
+                  <a:srgbClr val="A63D24"/>
                 </a:solidFill>
                 <a:latin typeface="맑은 고딕" pitchFamily="34" charset="0"/>
                 <a:ea typeface="맑은 고딕" pitchFamily="34" charset="-122"/>
@@ -18114,7 +17952,7 @@
             <a:r>
               <a:rPr lang="ko-KR" altLang="en-US" sz="1300" dirty="0">
                 <a:solidFill>
-                  <a:srgbClr val="FBF9F4"/>
+                  <a:srgbClr val="1B1F2A"/>
                 </a:solidFill>
                 <a:latin typeface="맑은 고딕" pitchFamily="34" charset="0"/>
                 <a:ea typeface="맑은 고딕" pitchFamily="34" charset="-122"/>
@@ -18143,7 +17981,7 @@
             </a:avLst>
           </a:prstGeom>
           <a:solidFill>
-            <a:srgbClr val="A63D24"/>
+            <a:srgbClr val="EFE2DA"/>
           </a:solidFill>
           <a:ln/>
         </p:spPr>
@@ -18178,7 +18016,7 @@
             <a:r>
               <a:rPr lang="ko-KR" altLang="en-US" sz="1200" b="1" dirty="0">
                 <a:solidFill>
-                  <a:srgbClr val="FBF9F4"/>
+                  <a:srgbClr val="A63D24"/>
                 </a:solidFill>
                 <a:latin typeface="맑은 고딕" pitchFamily="34" charset="0"/>
                 <a:ea typeface="맑은 고딕" pitchFamily="34" charset="-122"/>
@@ -18220,7 +18058,7 @@
             <a:r>
               <a:rPr lang="ko-KR" altLang="en-US" sz="1300" dirty="0">
                 <a:solidFill>
-                  <a:srgbClr val="FBF9F4"/>
+                  <a:srgbClr val="1B1F2A"/>
                 </a:solidFill>
                 <a:latin typeface="맑은 고딕" pitchFamily="34" charset="0"/>
                 <a:ea typeface="맑은 고딕" pitchFamily="34" charset="-122"/>
@@ -18249,7 +18087,7 @@
             </a:avLst>
           </a:prstGeom>
           <a:solidFill>
-            <a:srgbClr val="A63D24"/>
+            <a:srgbClr val="EFE2DA"/>
           </a:solidFill>
           <a:ln/>
         </p:spPr>
@@ -18284,7 +18122,7 @@
             <a:r>
               <a:rPr lang="ko-KR" altLang="en-US" sz="1200" b="1" dirty="0">
                 <a:solidFill>
-                  <a:srgbClr val="FBF9F4"/>
+                  <a:srgbClr val="A63D24"/>
                 </a:solidFill>
                 <a:latin typeface="맑은 고딕" pitchFamily="34" charset="0"/>
                 <a:ea typeface="맑은 고딕" pitchFamily="34" charset="-122"/>
@@ -18326,7 +18164,7 @@
             <a:r>
               <a:rPr lang="ko-KR" altLang="en-US" sz="1300" dirty="0">
                 <a:solidFill>
-                  <a:srgbClr val="FBF9F4"/>
+                  <a:srgbClr val="1B1F2A"/>
                 </a:solidFill>
                 <a:latin typeface="맑은 고딕" pitchFamily="34" charset="0"/>
                 <a:ea typeface="맑은 고딕" pitchFamily="34" charset="-122"/>

--- a/발표자료/예정된 전쟁.pptx
+++ b/발표자료/예정된 전쟁.pptx
@@ -126,21 +126,21 @@
   <p:extLst>
     <p:ext uri="{521415D9-36F7-43E2-AB2F-B90AF26B5E84}">
       <p14:sectionLst xmlns:p14="http://schemas.microsoft.com/office/powerpoint/2010/main">
-        <p14:section name="도입" id="{a7a7a737-45e9-28f6-9e69-d12255d761fe}">
+        <p14:section name="도입" id="{d7386951-585a-fbd5-6794-b23ac0a51a76}">
           <p14:sldIdLst>
             <p14:sldId id="256"/>
             <p14:sldId id="257"/>
             <p14:sldId id="258"/>
           </p14:sldIdLst>
         </p14:section>
-        <p14:section name="투키디데스 함정의 원리" id="{380b864c-17bf-774a-13b2-0d2482999133}">
+        <p14:section name="투키디데스 함정의 원리" id="{5169a991-bcdd-4c48-324b-d82d5ef501cf}">
           <p14:sldIdLst>
             <p14:sldId id="259"/>
             <p14:sldId id="260"/>
             <p14:sldId id="261"/>
           </p14:sldIdLst>
         </p14:section>
-        <p14:section name="중국의 부상과 500년의 역사" id="{9e8945a0-9100-d853-cb20-1d02a2b8f9b8}">
+        <p14:section name="중국의 부상과 500년의 역사" id="{0402149f-9f60-53cb-0ccd-05da7d549672}">
           <p14:sldIdLst>
             <p14:sldId id="262"/>
             <p14:sldId id="263"/>
@@ -148,7 +148,7 @@
             <p14:sldId id="265"/>
           </p14:sldIdLst>
         </p14:section>
-        <p14:section name="미중 충돌의 구조와 시나리오" id="{985585bf-e3a4-45f8-3d8e-89823baf1899}">
+        <p14:section name="미중 충돌의 구조와 시나리오" id="{92237a09-5aba-e6c6-4f74-777cbffe824d}">
           <p14:sldIdLst>
             <p14:sldId id="266"/>
             <p14:sldId id="267"/>
@@ -156,13 +156,13 @@
             <p14:sldId id="269"/>
           </p14:sldIdLst>
         </p14:section>
-        <p14:section name="전쟁을 피하는 길" id="{cd6c9cd4-0a22-b21b-9f37-d267785d2688}">
+        <p14:section name="전쟁을 피하는 길" id="{003d170e-0263-8d00-df6f-809c7b271e08}">
           <p14:sldIdLst>
             <p14:sldId id="270"/>
             <p14:sldId id="271"/>
           </p14:sldIdLst>
         </p14:section>
-        <p14:section name="출간 이후와 우리의 과제" id="{e6eb3b5c-0814-9b36-00f5-d591eddd4053}">
+        <p14:section name="출간 이후와 우리의 과제" id="{b3646ef4-f4c0-9929-d053-97871b0a3052}">
           <p14:sldIdLst>
             <p14:sldId id="272"/>
             <p14:sldId id="273"/>
@@ -2603,6 +2603,125 @@
 
 <file path=ppt/slideLayouts/slideLayout4.xml><?xml version="1.0" encoding="utf-8"?>
 <p:sldLayout xmlns:a="http://schemas.openxmlformats.org/drawingml/2006/main" xmlns:r="http://schemas.openxmlformats.org/officeDocument/2006/relationships" xmlns:p="http://schemas.openxmlformats.org/presentationml/2006/main" preserve="1">
+  <p:cSld name="LIGHT_NOTITLE">
+    <p:bg>
+      <p:bgPr>
+        <a:solidFill>
+          <a:srgbClr val="FFFFFF"/>
+        </a:solidFill>
+      </p:bgPr>
+    </p:bg>
+    <p:spTree>
+      <p:nvGrpSpPr>
+        <p:cNvPr id="1" name=""/>
+        <p:cNvGrpSpPr/>
+        <p:nvPr/>
+      </p:nvGrpSpPr>
+      <p:grpSpPr>
+        <a:xfrm>
+          <a:off x="0" y="0"/>
+          <a:ext cx="0" cy="0"/>
+          <a:chOff x="0" y="0"/>
+          <a:chExt cx="0" cy="0"/>
+        </a:xfrm>
+      </p:grpSpPr>
+      <p:sp>
+        <p:nvSpPr>
+          <p:cNvPr id="2" name="Text 0"/>
+          <p:cNvSpPr/>
+          <p:nvPr/>
+        </p:nvSpPr>
+        <p:spPr>
+          <a:xfrm>
+            <a:off x="812800" y="6235700"/>
+            <a:ext cx="7620000" cy="215900"/>
+          </a:xfrm>
+          <a:prstGeom prst="rect">
+            <a:avLst/>
+          </a:prstGeom>
+          <a:noFill/>
+          <a:ln/>
+        </p:spPr>
+        <p:txBody>
+          <a:bodyPr wrap="square" lIns="0" tIns="0" rIns="0" bIns="0" rtlCol="0" anchor="ctr"/>
+          <a:lstStyle/>
+          <a:p>
+            <a:pPr eaLnBrk="0" indent="0" marL="0">
+              <a:buNone/>
+            </a:pPr>
+            <a:r>
+              <a:rPr lang="ko-KR" altLang="en-US" sz="1200" dirty="0">
+                <a:solidFill>
+                  <a:srgbClr val="555A66"/>
+                </a:solidFill>
+                <a:latin typeface="맑은 고딕" pitchFamily="34" charset="0"/>
+                <a:ea typeface="맑은 고딕" pitchFamily="34" charset="-122"/>
+                <a:cs typeface="맑은 고딕" pitchFamily="34" charset="-120"/>
+              </a:rPr>
+              <a:t>예정된 전쟁 · 그레이엄 앨리슨</a:t>
+            </a:r>
+            <a:endParaRPr lang="ko-KR" altLang="en-US" sz="1200" dirty="0"/>
+          </a:p>
+        </p:txBody>
+      </p:sp>
+      <p:sp>
+        <p:nvSpPr>
+          <p:cNvPr id="25" name="Slide Number Placeholder 0"/>
+          <p:cNvSpPr>
+            <a:spLocks noGrp="1"/>
+          </p:cNvSpPr>
+          <p:nvPr>
+            <p:ph type="sldNum" sz="quarter" idx="4294967295"/>
+          </p:nvPr>
+        </p:nvSpPr>
+        <p:spPr>
+          <a:xfrm>
+            <a:off x="10109200" y="6235700"/>
+            <a:ext cx="1270000" cy="215900"/>
+          </a:xfrm>
+          <a:prstGeom prst="rect">
+            <a:avLst/>
+          </a:prstGeom>
+          <a:extLst>
+            <a:ext uri="{C572A759-6A51-4108-AA02-DFA0A04FC94B}">
+              <ma14:wrappingTextBoxFlag xmlns:ma14="http://schemas.microsoft.com/office/mac/drawingml/2011/main" val="0"/>
+            </a:ext>
+          </a:extLst>
+        </p:spPr>
+        <p:txBody>
+          <a:bodyPr lIns="0" tIns="0" rIns="0" bIns="0"/>
+          <a:lstStyle>
+            <a:lvl1pPr>
+              <a:defRPr sz="1200">
+                <a:solidFill>
+                  <a:srgbClr val="555A66"/>
+                </a:solidFill>
+                <a:latin typeface="맑은 고딕"/>
+                <a:ea typeface="맑은 고딕"/>
+                <a:cs typeface="맑은 고딕"/>
+              </a:defRPr>
+            </a:lvl1pPr>
+          </a:lstStyle>
+          <a:p>
+            <a:pPr eaLnBrk="0" algn="r"/>
+            <a:fld id="{F7021451-1387-4CA6-816F-3879F97B5CBC}" type="slidenum">
+              <a:rPr b="0" lang="ko-KR" altLang="en-US"/>
+              <a:t>1004</a:t>
+            </a:fld>
+            <a:endParaRPr lang="ko-KR" altLang="en-US"/>
+          </a:p>
+        </p:txBody>
+      </p:sp>
+    </p:spTree>
+  </p:cSld>
+  <p:clrMapOvr>
+    <a:masterClrMapping/>
+  </p:clrMapOvr>
+</p:sldLayout>
+</file>
+
+<file path=ppt/slideLayouts/slideLayout5.xml><?xml version="1.0" encoding="utf-8"?>
+<p:sldLayout xmlns:a="http://schemas.openxmlformats.org/drawingml/2006/main" xmlns:r="http://schemas.openxmlformats.org/officeDocument/2006/relationships" xmlns:p="http://schemas.openxmlformats.org/presentationml/2006/main" preserve="1">
   <p:cSld name="PLAIN">
     <p:bg>
       <p:bgPr>
@@ -2706,6 +2825,7 @@
     <p:sldLayoutId id="2147483650" r:id="rId2"/>
     <p:sldLayoutId id="2147483651" r:id="rId3"/>
     <p:sldLayoutId id="2147483652" r:id="rId4"/>
+    <p:sldLayoutId id="2147483653" r:id="rId5"/>
   </p:sldLayoutIdLst>
   <p:hf sldNum="0" hdr="0" ftr="0" dt="0"/>
   <p:txStyles>
@@ -12913,36 +13033,6 @@
       </p:sp>
       <p:sp>
         <p:nvSpPr>
-          <p:cNvPr id="7" name="Text 1"/>
-          <p:cNvSpPr/>
-          <p:nvPr>
-            <p:ph idx="101" type="title" hasCustomPrompt="1"/>
-          </p:nvPr>
-        </p:nvSpPr>
-        <p:spPr>
-          <a:xfrm>
-            <a:off x="812800" y="1066800"/>
-            <a:ext cx="10566400" cy="609600"/>
-          </a:xfrm>
-          <a:prstGeom prst="rect">
-            <a:avLst/>
-          </a:prstGeom>
-          <a:noFill/>
-          <a:ln/>
-        </p:spPr>
-        <p:txBody>
-          <a:bodyPr wrap="square" lIns="0" tIns="0" rIns="0" bIns="0" rtlCol="0" anchor="t"/>
-          <a:lstStyle/>
-          <a:p>
-            <a:pPr eaLnBrk="0" algn="l" indent="0" marL="0">
-              <a:buNone/>
-            </a:pPr>
-            <a:endParaRPr lang="ko-KR" altLang="en-US" sz="3200" dirty="0"/>
-          </a:p>
-        </p:txBody>
-      </p:sp>
-      <p:sp>
-        <p:nvSpPr>
           <p:cNvPr id="25" name="Slide Number Placeholder 0"/>
           <p:cNvSpPr>
             <a:spLocks noGrp="1"/>
